--- a/과제정의서.pptx
+++ b/과제정의서.pptx
@@ -211,7 +211,7 @@
           <a:p>
             <a:fld id="{CCD26DCF-1716-484D-9C58-882373CAEEA5}" type="datetimeFigureOut">
               <a:rPr lang="ko-KR" altLang="en-US" smtClean="0"/>
-              <a:t>2026. 4. 27.</a:t>
+              <a:t>2026. 5. 29.</a:t>
             </a:fld>
             <a:endParaRPr lang="ko-KR" altLang="en-US"/>
           </a:p>
@@ -1428,7 +1428,7 @@
           <a:p>
             <a:fld id="{8EF495C4-D990-47E5-87EB-7F0830E8B335}" type="datetimeFigureOut">
               <a:rPr lang="ko-KR" altLang="en-US" smtClean="0"/>
-              <a:t>2026. 4. 27.</a:t>
+              <a:t>2026. 5. 29.</a:t>
             </a:fld>
             <a:endParaRPr lang="ko-KR" altLang="en-US"/>
           </a:p>
@@ -1639,7 +1639,7 @@
           <a:p>
             <a:fld id="{8EF495C4-D990-47E5-87EB-7F0830E8B335}" type="datetimeFigureOut">
               <a:rPr lang="ko-KR" altLang="en-US" smtClean="0"/>
-              <a:t>2026. 4. 27.</a:t>
+              <a:t>2026. 5. 29.</a:t>
             </a:fld>
             <a:endParaRPr lang="ko-KR" altLang="en-US"/>
           </a:p>
@@ -1845,7 +1845,7 @@
           <a:p>
             <a:fld id="{8EF495C4-D990-47E5-87EB-7F0830E8B335}" type="datetimeFigureOut">
               <a:rPr lang="ko-KR" altLang="en-US" smtClean="0"/>
-              <a:t>2026. 4. 27.</a:t>
+              <a:t>2026. 5. 29.</a:t>
             </a:fld>
             <a:endParaRPr lang="ko-KR" altLang="en-US"/>
           </a:p>
@@ -2139,7 +2139,7 @@
           <a:p>
             <a:fld id="{8EF495C4-D990-47E5-87EB-7F0830E8B335}" type="datetimeFigureOut">
               <a:rPr lang="ko-KR" altLang="en-US" smtClean="0"/>
-              <a:t>2026. 4. 27.</a:t>
+              <a:t>2026. 5. 29.</a:t>
             </a:fld>
             <a:endParaRPr lang="ko-KR" altLang="en-US"/>
           </a:p>
@@ -2412,7 +2412,7 @@
           <a:p>
             <a:fld id="{8EF495C4-D990-47E5-87EB-7F0830E8B335}" type="datetimeFigureOut">
               <a:rPr lang="ko-KR" altLang="en-US" smtClean="0"/>
-              <a:t>2026. 4. 27.</a:t>
+              <a:t>2026. 5. 29.</a:t>
             </a:fld>
             <a:endParaRPr lang="ko-KR" altLang="en-US"/>
           </a:p>
@@ -2827,7 +2827,7 @@
           <a:p>
             <a:fld id="{8EF495C4-D990-47E5-87EB-7F0830E8B335}" type="datetimeFigureOut">
               <a:rPr lang="ko-KR" altLang="en-US" smtClean="0"/>
-              <a:t>2026. 4. 27.</a:t>
+              <a:t>2026. 5. 29.</a:t>
             </a:fld>
             <a:endParaRPr lang="ko-KR" altLang="en-US"/>
           </a:p>
@@ -2976,7 +2976,7 @@
           <a:p>
             <a:fld id="{8EF495C4-D990-47E5-87EB-7F0830E8B335}" type="datetimeFigureOut">
               <a:rPr lang="ko-KR" altLang="en-US" smtClean="0"/>
-              <a:t>2026. 4. 27.</a:t>
+              <a:t>2026. 5. 29.</a:t>
             </a:fld>
             <a:endParaRPr lang="ko-KR" altLang="en-US"/>
           </a:p>
@@ -3089,7 +3089,7 @@
           <a:p>
             <a:fld id="{8EF495C4-D990-47E5-87EB-7F0830E8B335}" type="datetimeFigureOut">
               <a:rPr lang="ko-KR" altLang="en-US" smtClean="0"/>
-              <a:t>2026. 4. 27.</a:t>
+              <a:t>2026. 5. 29.</a:t>
             </a:fld>
             <a:endParaRPr lang="ko-KR" altLang="en-US"/>
           </a:p>
@@ -3403,7 +3403,7 @@
           <a:p>
             <a:fld id="{8EF495C4-D990-47E5-87EB-7F0830E8B335}" type="datetimeFigureOut">
               <a:rPr lang="ko-KR" altLang="en-US" smtClean="0"/>
-              <a:t>2026. 4. 27.</a:t>
+              <a:t>2026. 5. 29.</a:t>
             </a:fld>
             <a:endParaRPr lang="ko-KR" altLang="en-US"/>
           </a:p>
@@ -3694,7 +3694,7 @@
           <a:p>
             <a:fld id="{8EF495C4-D990-47E5-87EB-7F0830E8B335}" type="datetimeFigureOut">
               <a:rPr lang="ko-KR" altLang="en-US" smtClean="0"/>
-              <a:t>2026. 4. 27.</a:t>
+              <a:t>2026. 5. 29.</a:t>
             </a:fld>
             <a:endParaRPr lang="ko-KR" altLang="en-US"/>
           </a:p>
@@ -3900,7 +3900,7 @@
           <a:p>
             <a:fld id="{8EF495C4-D990-47E5-87EB-7F0830E8B335}" type="datetimeFigureOut">
               <a:rPr lang="ko-KR" altLang="en-US" smtClean="0"/>
-              <a:t>2026. 4. 27.</a:t>
+              <a:t>2026. 5. 29.</a:t>
             </a:fld>
             <a:endParaRPr lang="ko-KR" altLang="en-US"/>
           </a:p>
@@ -4398,178 +4398,236 @@
             <a:endParaRPr lang="en-US" altLang="ko-KR" sz="1100" dirty="0"/>
           </a:p>
           <a:p>
+            <a:r>
+              <a:rPr lang="en-US" altLang="ko-KR" sz="1100" dirty="0"/>
+              <a:t>:</a:t>
+            </a:r>
+            <a:r>
+              <a:rPr lang="ko-KR" altLang="en-US" sz="1100" dirty="0"/>
+              <a:t> </a:t>
+            </a:r>
+            <a:r>
+              <a:rPr lang="ko-KR" altLang="ko-KR" sz="1100" dirty="0"/>
+              <a:t>기자 정보 검색 및 기사 수집 → 기사 내용 검토 및 정리 → 정부 정책 및 주요 이슈 모니터링 → 과거 </a:t>
+            </a:r>
+            <a:r>
+              <a:rPr lang="ko-KR" altLang="ko-KR" sz="1100" dirty="0" err="1"/>
+              <a:t>보도자료·입장문</a:t>
+            </a:r>
+            <a:r>
+              <a:rPr lang="ko-KR" altLang="ko-KR" sz="1100" dirty="0"/>
+              <a:t> 검색 → 분석자료 작성 → 보고서 및 대응자료 작성</a:t>
+            </a:r>
+            <a:endParaRPr lang="en-US" altLang="ko-KR" sz="1100" dirty="0"/>
+          </a:p>
+          <a:p>
+            <a:endParaRPr lang="ko-KR" altLang="ko-KR" sz="1100" dirty="0"/>
+          </a:p>
+          <a:p>
             <a:pPr>
               <a:lnSpc>
                 <a:spcPct val="150000"/>
               </a:lnSpc>
             </a:pPr>
             <a:r>
-              <a:rPr lang="en-US" altLang="ko-KR" sz="1100" dirty="0"/>
-              <a:t>:</a:t>
-            </a:r>
-            <a:r>
-              <a:rPr lang="ko-KR" altLang="en-US" sz="1100" dirty="0"/>
-              <a:t> 수작업 검색 등을 통해 데이터 수집 </a:t>
-            </a:r>
-            <a:r>
-              <a:rPr lang="en-US" altLang="ko-KR" sz="1100" dirty="0">
-                <a:sym typeface="Wingdings" pitchFamily="2" charset="2"/>
-              </a:rPr>
-              <a:t></a:t>
-            </a:r>
-            <a:r>
-              <a:rPr lang="ko-KR" altLang="en-US" sz="1100" dirty="0"/>
-              <a:t> 엑셀로 정리 </a:t>
-            </a:r>
-            <a:r>
-              <a:rPr lang="en-US" altLang="ko-KR" sz="1100" dirty="0">
-                <a:sym typeface="Wingdings" pitchFamily="2" charset="2"/>
-              </a:rPr>
-              <a:t></a:t>
-            </a:r>
-            <a:r>
-              <a:rPr lang="ko-KR" altLang="en-US" sz="1100" dirty="0">
-                <a:sym typeface="Wingdings" pitchFamily="2" charset="2"/>
-              </a:rPr>
-              <a:t> 메일 발송</a:t>
-            </a:r>
-            <a:endParaRPr lang="ko-KR" altLang="en-US" sz="1100" dirty="0"/>
-          </a:p>
-          <a:p>
-            <a:pPr>
-              <a:lnSpc>
-                <a:spcPct val="150000"/>
-              </a:lnSpc>
-            </a:pPr>
-            <a:endParaRPr lang="ko-KR" altLang="en-US" sz="1100" dirty="0"/>
-          </a:p>
-          <a:p>
-            <a:pPr>
-              <a:lnSpc>
-                <a:spcPct val="150000"/>
-              </a:lnSpc>
-            </a:pPr>
-            <a:r>
               <a:rPr lang="en-US" altLang="ko-KR" sz="1100" b="1" dirty="0"/>
               <a:t>② Pain Point</a:t>
             </a:r>
           </a:p>
           <a:p>
-            <a:pPr marL="171450" indent="-171450">
-              <a:lnSpc>
-                <a:spcPct val="150000"/>
-              </a:lnSpc>
-              <a:buFontTx/>
-              <a:buChar char="-"/>
-            </a:pPr>
+            <a:r>
+              <a:rPr lang="ko-KR" altLang="ko-KR" sz="1100" b="1" dirty="0"/>
+              <a:t>[환경]</a:t>
+            </a:r>
+          </a:p>
+          <a:p>
+            <a:r>
+              <a:rPr lang="ko-KR" altLang="en-US" sz="1100" dirty="0"/>
+              <a:t> </a:t>
+            </a:r>
             <a:r>
               <a:rPr lang="en-US" altLang="ko-KR" sz="1100" dirty="0"/>
-              <a:t>[</a:t>
+              <a:t>-</a:t>
             </a:r>
             <a:r>
               <a:rPr lang="ko-KR" altLang="en-US" sz="1100" dirty="0"/>
-              <a:t>환경</a:t>
-            </a:r>
-            <a:r>
-              <a:rPr lang="en-US" altLang="ko-KR" sz="1100" dirty="0"/>
-              <a:t>] </a:t>
-            </a:r>
-            <a:r>
-              <a:rPr lang="ko-KR" altLang="en-US" sz="1100" dirty="0"/>
-              <a:t>경쟁사들은 원자재 가격 변동</a:t>
-            </a:r>
-            <a:r>
-              <a:rPr lang="en-US" altLang="ko-KR" sz="1100" dirty="0"/>
-              <a:t>, </a:t>
-            </a:r>
-            <a:r>
-              <a:rPr lang="ko-KR" altLang="en-US" sz="1100" dirty="0"/>
-              <a:t>환경</a:t>
-            </a:r>
-            <a:r>
-              <a:rPr lang="en-US" altLang="ko-KR" sz="1100" dirty="0"/>
-              <a:t>/</a:t>
-            </a:r>
-            <a:r>
-              <a:rPr lang="ko-KR" altLang="en-US" sz="1100" dirty="0"/>
-              <a:t>관세 정책 변화 등 급격한 시장 환경 변화에 따라 해외 진출</a:t>
-            </a:r>
-            <a:r>
-              <a:rPr lang="en-US" altLang="ko-KR" sz="1100" dirty="0"/>
-              <a:t>, </a:t>
-            </a:r>
-            <a:r>
-              <a:rPr lang="ko-KR" altLang="en-US" sz="1100" dirty="0"/>
-              <a:t>설비 투자 등 빠른 전략 수립 </a:t>
-            </a:r>
-            <a:r>
-              <a:rPr lang="en-US" altLang="ko-KR" sz="1100" dirty="0"/>
-              <a:t>· </a:t>
-            </a:r>
-            <a:r>
-              <a:rPr lang="ko-KR" altLang="en-US" sz="1100" dirty="0"/>
-              <a:t>실행으로 경쟁력을 확보하고 있음</a:t>
+              <a:t> </a:t>
+            </a:r>
+            <a:r>
+              <a:rPr lang="ko-KR" altLang="ko-KR" sz="1100" dirty="0"/>
+              <a:t>언론</a:t>
             </a:r>
             <a:r>
               <a:rPr lang="en-US" altLang="ko-KR" sz="1100" dirty="0"/>
               <a:t>. </a:t>
             </a:r>
             <a:r>
+              <a:rPr lang="ko-KR" altLang="ko-KR" sz="1100" dirty="0"/>
+              <a:t>환경</a:t>
+            </a:r>
+            <a:r>
+              <a:rPr lang="en-US" altLang="ko-KR" sz="1100" dirty="0"/>
+              <a:t>. </a:t>
+            </a:r>
+            <a:r>
+              <a:rPr lang="ko-KR" altLang="ko-KR" sz="1100" dirty="0"/>
+              <a:t>및 정책 변화</a:t>
+            </a:r>
+            <a:r>
+              <a:rPr lang="en-US" altLang="ko-KR" sz="1100" dirty="0"/>
+              <a:t>. </a:t>
+            </a:r>
+            <a:r>
+              <a:rPr lang="ko-KR" altLang="ko-KR" sz="1100" dirty="0"/>
+              <a:t>속도가 빨라지고 있으며, 기업 평판 및 대외 커뮤니케이션의 중요성이</a:t>
+            </a:r>
+            <a:r>
+              <a:rPr lang="en-US" altLang="ko-KR" sz="1100" dirty="0"/>
+              <a:t>. </a:t>
+            </a:r>
+            <a:r>
+              <a:rPr lang="ko-KR" altLang="ko-KR" sz="1100" dirty="0"/>
+              <a:t>지속적으로 증가하고 있음.</a:t>
+            </a:r>
+            <a:endParaRPr lang="en-US" altLang="ko-KR" sz="1100" dirty="0"/>
+          </a:p>
+          <a:p>
+            <a:r>
               <a:rPr lang="ko-KR" altLang="en-US" sz="1100" dirty="0"/>
-              <a:t>이와 같은 </a:t>
-            </a:r>
-            <a:r>
-              <a:rPr lang="ko-KR" altLang="en-US" sz="1100" dirty="0" err="1"/>
-              <a:t>상황하에서</a:t>
+              <a:t> </a:t>
+            </a:r>
+            <a:r>
+              <a:rPr lang="en-US" altLang="ko-KR" sz="1100" dirty="0"/>
+              <a:t>-</a:t>
             </a:r>
             <a:r>
               <a:rPr lang="ko-KR" altLang="en-US" sz="1100" dirty="0"/>
-              <a:t> 신속한 정보 확보는 기업 경쟁력의 핵심 요소로 부상</a:t>
+              <a:t> </a:t>
+            </a:r>
+            <a:r>
+              <a:rPr lang="ko-KR" altLang="ko-KR" sz="1100" dirty="0"/>
+              <a:t>특히</a:t>
             </a:r>
             <a:r>
               <a:rPr lang="en-US" altLang="ko-KR" sz="1100" dirty="0"/>
-              <a:t>.</a:t>
-            </a:r>
-          </a:p>
-          <a:p>
-            <a:pPr marL="171450" indent="-171450">
-              <a:lnSpc>
-                <a:spcPct val="150000"/>
-              </a:lnSpc>
-              <a:buFontTx/>
-              <a:buChar char="-"/>
-            </a:pPr>
+              <a:t>,</a:t>
+            </a:r>
+            <a:r>
+              <a:rPr lang="ko-KR" altLang="ko-KR" sz="1100" dirty="0"/>
+              <a:t> </a:t>
+            </a:r>
+            <a:r>
+              <a:rPr lang="ko-KR" altLang="ko-KR" sz="1100" dirty="0" err="1"/>
+              <a:t>기자별</a:t>
+            </a:r>
+            <a:r>
+              <a:rPr lang="ko-KR" altLang="ko-KR" sz="1100" dirty="0"/>
+              <a:t> 관심사, 정부 정책 방향, 사회적 이슈에 대한 신속한 분석 및 대응 역량이 기업 경쟁력의 핵심 요소로 부상하고 있음.</a:t>
+            </a:r>
+            <a:endParaRPr lang="en-US" altLang="ko-KR" sz="1100" b="1" dirty="0"/>
+          </a:p>
+          <a:p>
+            <a:r>
+              <a:rPr lang="ko-KR" altLang="ko-KR" sz="1100" b="1" dirty="0"/>
+              <a:t>[한계]</a:t>
+            </a:r>
+          </a:p>
+          <a:p>
+            <a:r>
+              <a:rPr lang="ko-KR" altLang="en-US" sz="1100" dirty="0"/>
+              <a:t> </a:t>
+            </a:r>
             <a:r>
               <a:rPr lang="en-US" altLang="ko-KR" sz="1100" dirty="0"/>
-              <a:t>[</a:t>
+              <a:t>-</a:t>
             </a:r>
             <a:r>
               <a:rPr lang="ko-KR" altLang="en-US" sz="1100" dirty="0"/>
-              <a:t>한계</a:t>
+              <a:t> </a:t>
+            </a:r>
+            <a:r>
+              <a:rPr lang="ko-KR" altLang="ko-KR" sz="1100" dirty="0"/>
+              <a:t>기자 정보 및 기사 분석을 개별 검색에 의존하여 정보 수집 시간이 과다 소요됨</a:t>
+            </a:r>
+          </a:p>
+          <a:p>
+            <a:r>
+              <a:rPr lang="ko-KR" altLang="en-US" sz="1100" dirty="0"/>
+              <a:t> </a:t>
             </a:r>
             <a:r>
               <a:rPr lang="en-US" altLang="ko-KR" sz="1100" dirty="0"/>
-              <a:t>] </a:t>
+              <a:t>-</a:t>
             </a:r>
             <a:r>
               <a:rPr lang="ko-KR" altLang="en-US" sz="1100" dirty="0"/>
-              <a:t>현재 정책 변화 </a:t>
+              <a:t> </a:t>
+            </a:r>
+            <a:r>
+              <a:rPr lang="ko-KR" altLang="ko-KR" sz="1100" dirty="0"/>
+              <a:t>정부 정책 및 주요 인사 발언 모니터링이 수작업 중심으로 수행됨</a:t>
+            </a:r>
+          </a:p>
+          <a:p>
+            <a:r>
+              <a:rPr lang="ko-KR" altLang="en-US" sz="1100" dirty="0"/>
+              <a:t> </a:t>
             </a:r>
             <a:r>
               <a:rPr lang="en-US" altLang="ko-KR" sz="1100" dirty="0"/>
-              <a:t>· </a:t>
+              <a:t>-</a:t>
             </a:r>
             <a:r>
               <a:rPr lang="ko-KR" altLang="en-US" sz="1100" dirty="0"/>
-              <a:t>경쟁사 동향 파악은 수작업 기사 검색에 의존하고 있으며</a:t>
+              <a:t> </a:t>
+            </a:r>
+            <a:r>
+              <a:rPr lang="ko-KR" altLang="ko-KR" sz="1100" dirty="0"/>
+              <a:t>과거 보도자료, </a:t>
+            </a:r>
+            <a:r>
+              <a:rPr lang="ko-KR" altLang="ko-KR" sz="1100" dirty="0" err="1"/>
+              <a:t>입장문</a:t>
+            </a:r>
+            <a:r>
+              <a:rPr lang="ko-KR" altLang="ko-KR" sz="1100" dirty="0"/>
+              <a:t> 등 내부 자료 검색이 비효율적임</a:t>
+            </a:r>
+          </a:p>
+          <a:p>
+            <a:r>
+              <a:rPr lang="ko-KR" altLang="en-US" sz="1100" dirty="0"/>
+              <a:t> </a:t>
             </a:r>
             <a:r>
               <a:rPr lang="en-US" altLang="ko-KR" sz="1100" dirty="0"/>
-              <a:t>, </a:t>
+              <a:t>-</a:t>
             </a:r>
             <a:r>
               <a:rPr lang="ko-KR" altLang="en-US" sz="1100" dirty="0"/>
-              <a:t>정보 수집에 많은 시간이 소요됨</a:t>
+              <a:t> </a:t>
+            </a:r>
+            <a:r>
+              <a:rPr lang="ko-KR" altLang="ko-KR" sz="1100" dirty="0"/>
+              <a:t>이슈 발생 시 사업회사별 영향도 및 대응 메시지 도출에 많은 시간이 필요함</a:t>
+            </a:r>
+          </a:p>
+          <a:p>
+            <a:r>
+              <a:rPr lang="ko-KR" altLang="en-US" sz="1100" dirty="0"/>
+              <a:t> </a:t>
+            </a:r>
+            <a:r>
+              <a:rPr lang="en-US" altLang="ko-KR" sz="1100" dirty="0"/>
+              <a:t>-</a:t>
+            </a:r>
+            <a:r>
+              <a:rPr lang="ko-KR" altLang="en-US" sz="1100" dirty="0"/>
+              <a:t> </a:t>
+            </a:r>
+            <a:r>
+              <a:rPr lang="ko-KR" altLang="ko-KR" sz="1100" dirty="0"/>
+              <a:t>데이터 수집, 분석, 보고서 작성 업무가 반복적으로 발생하여 업무 생산성이 저하됨</a:t>
             </a:r>
           </a:p>
         </p:txBody>
@@ -4766,82 +4824,7 @@
             </a:r>
             <a:r>
               <a:rPr lang="ko-KR" altLang="en-US" sz="1100" b="1" dirty="0"/>
-              <a:t>개선내용</a:t>
-            </a:r>
-          </a:p>
-          <a:p>
-            <a:pPr marL="171450" indent="-171450">
-              <a:buFontTx/>
-              <a:buChar char="-"/>
-              <a:defRPr/>
-            </a:pPr>
-            <a:r>
-              <a:rPr lang="ko-KR" altLang="en-US" sz="1100" dirty="0"/>
-              <a:t>반복 </a:t>
-            </a:r>
-            <a:r>
-              <a:rPr lang="en-US" altLang="ko-KR" sz="1100" dirty="0"/>
-              <a:t>· </a:t>
-            </a:r>
-            <a:r>
-              <a:rPr lang="ko-KR" altLang="en-US" sz="1100" dirty="0"/>
-              <a:t>수동적인 정보 검색 업무를 자동화하여 업무 효율성 확보</a:t>
-            </a:r>
-            <a:endParaRPr lang="en-US" altLang="ko-KR" sz="1100" dirty="0"/>
-          </a:p>
-          <a:p>
-            <a:pPr marL="171450" indent="-171450">
-              <a:buFontTx/>
-              <a:buChar char="-"/>
-              <a:defRPr/>
-            </a:pPr>
-            <a:r>
-              <a:rPr lang="ko-KR" altLang="en-US" sz="1100" dirty="0"/>
-              <a:t>경쟁사 관련 뉴스 </a:t>
-            </a:r>
-            <a:r>
-              <a:rPr lang="en-US" altLang="ko-KR" sz="1100" dirty="0"/>
-              <a:t>· </a:t>
-            </a:r>
-            <a:r>
-              <a:rPr lang="ko-KR" altLang="en-US" sz="1100" dirty="0"/>
-              <a:t>보도자료 </a:t>
-            </a:r>
-            <a:r>
-              <a:rPr lang="en-US" altLang="ko-KR" sz="1100" dirty="0"/>
-              <a:t>· </a:t>
-            </a:r>
-            <a:r>
-              <a:rPr lang="ko-KR" altLang="en-US" sz="1100" dirty="0"/>
-              <a:t>공시정보를 실시간으로 수집 </a:t>
-            </a:r>
-            <a:r>
-              <a:rPr lang="en-US" altLang="ko-KR" sz="1100" dirty="0"/>
-              <a:t>· </a:t>
-            </a:r>
-            <a:r>
-              <a:rPr lang="ko-KR" altLang="en-US" sz="1100" dirty="0"/>
-              <a:t>분석하여 경영진 </a:t>
-            </a:r>
-            <a:r>
-              <a:rPr lang="en-US" altLang="ko-KR" sz="1100" dirty="0"/>
-              <a:t>Reporting </a:t>
-            </a:r>
-            <a:r>
-              <a:rPr lang="ko-KR" altLang="en-US" sz="1100" dirty="0"/>
-              <a:t>등 의사결정 지원</a:t>
-            </a:r>
-            <a:endParaRPr lang="en-US" altLang="ko-KR" sz="1100" dirty="0"/>
-          </a:p>
-          <a:p>
-            <a:pPr marL="171450" indent="-171450">
-              <a:buFontTx/>
-              <a:buChar char="-"/>
-              <a:defRPr/>
-            </a:pPr>
-            <a:r>
-              <a:rPr lang="ko-KR" altLang="en-US" sz="1100" dirty="0"/>
-              <a:t>관세 정책 등 주요 시장 환경 변화에 대한 데이터 기반의 신속한 대응 가능</a:t>
+              <a:t>주요 개발 내용</a:t>
             </a:r>
             <a:endParaRPr lang="en-US" altLang="ko-KR" sz="1100" dirty="0"/>
           </a:p>
@@ -4850,44 +4833,90 @@
               <a:defRPr/>
             </a:pPr>
             <a:r>
+              <a:rPr lang="ko-KR" altLang="ko-KR" sz="1100" dirty="0" err="1"/>
+              <a:t>AI를</a:t>
+            </a:r>
+            <a:r>
+              <a:rPr lang="ko-KR" altLang="ko-KR" sz="1100" dirty="0"/>
+              <a:t> 활용하여 </a:t>
+            </a:r>
+            <a:r>
+              <a:rPr lang="ko-KR" altLang="ko-KR" sz="1100" dirty="0" err="1"/>
+              <a:t>경쟁사·시장·인사노무</a:t>
+            </a:r>
+            <a:r>
+              <a:rPr lang="ko-KR" altLang="ko-KR" sz="1100" dirty="0"/>
+              <a:t> 정보를 통합 </a:t>
+            </a:r>
+            <a:r>
+              <a:rPr lang="ko-KR" altLang="ko-KR" sz="1100" dirty="0" err="1"/>
+              <a:t>수집·분석하는</a:t>
+            </a:r>
+            <a:r>
+              <a:rPr lang="ko-KR" altLang="ko-KR" sz="1100" dirty="0"/>
+              <a:t> 의사결정 지원 플랫폼을 구축함.</a:t>
+            </a:r>
+          </a:p>
+          <a:p>
+            <a:pPr>
+              <a:defRPr/>
+            </a:pPr>
+            <a:r>
               <a:rPr lang="ko-KR" altLang="en-US" sz="1100" dirty="0"/>
-              <a:t>   *  뉴스 포털</a:t>
+              <a:t> </a:t>
             </a:r>
             <a:r>
               <a:rPr lang="en-US" altLang="ko-KR" sz="1100" dirty="0"/>
-              <a:t>, DART </a:t>
+              <a:t>-</a:t>
             </a:r>
             <a:r>
               <a:rPr lang="ko-KR" altLang="en-US" sz="1100" dirty="0"/>
-              <a:t>등의 채널을 활용한 주요 </a:t>
-            </a:r>
-            <a:r>
-              <a:rPr lang="ko-KR" altLang="en-US" sz="1100" dirty="0" err="1"/>
-              <a:t>컬러사</a:t>
+              <a:t> </a:t>
             </a:r>
             <a:r>
               <a:rPr lang="en-US" altLang="ko-KR" sz="1100" dirty="0"/>
-              <a:t>, </a:t>
+              <a:t>AI </a:t>
             </a:r>
             <a:r>
               <a:rPr lang="ko-KR" altLang="en-US" sz="1100" dirty="0"/>
-              <a:t>원자재 가격 추이</a:t>
+              <a:t>기반 경쟁사 동향 대시보드를 구축하여 경쟁사 정보와 시장 동향을 자동 분석</a:t>
             </a:r>
             <a:r>
               <a:rPr lang="en-US" altLang="ko-KR" sz="1100" dirty="0"/>
-              <a:t>, </a:t>
-            </a:r>
+              <a:t>  </a:t>
+            </a:r>
+          </a:p>
+          <a:p>
+            <a:pPr>
+              <a:defRPr/>
+            </a:pPr>
             <a:r>
               <a:rPr lang="ko-KR" altLang="en-US" sz="1100" dirty="0"/>
-              <a:t>환율</a:t>
+              <a:t> </a:t>
             </a:r>
             <a:r>
               <a:rPr lang="en-US" altLang="ko-KR" sz="1100" dirty="0"/>
-              <a:t>, </a:t>
+              <a:t>-</a:t>
             </a:r>
             <a:r>
               <a:rPr lang="ko-KR" altLang="en-US" sz="1100" dirty="0"/>
-              <a:t>산업 동향 등</a:t>
+              <a:t> 환율</a:t>
+            </a:r>
+            <a:r>
+              <a:rPr lang="en-US" altLang="ko-KR" sz="1100" dirty="0"/>
+              <a:t>·</a:t>
+            </a:r>
+            <a:r>
+              <a:rPr lang="ko-KR" altLang="en-US" sz="1100" dirty="0"/>
+              <a:t>원자재</a:t>
+            </a:r>
+            <a:r>
+              <a:rPr lang="en-US" altLang="ko-KR" sz="1100" dirty="0"/>
+              <a:t>·</a:t>
+            </a:r>
+            <a:r>
+              <a:rPr lang="ko-KR" altLang="en-US" sz="1100" dirty="0"/>
+              <a:t>에너지 지표를 활용한 구매 의사결정 지원 모니터링 기능을</a:t>
             </a:r>
             <a:r>
               <a:rPr lang="en-US" altLang="ko-KR" sz="1100" dirty="0"/>
@@ -4895,8 +4924,75 @@
             </a:r>
             <a:r>
               <a:rPr lang="ko-KR" altLang="en-US" sz="1100" dirty="0"/>
-              <a:t>자동 모니터링</a:t>
-            </a:r>
+              <a:t>개발</a:t>
+            </a:r>
+            <a:r>
+              <a:rPr lang="en-US" altLang="ko-KR" sz="1100" dirty="0"/>
+              <a:t>  </a:t>
+            </a:r>
+          </a:p>
+          <a:p>
+            <a:pPr>
+              <a:defRPr/>
+            </a:pPr>
+            <a:r>
+              <a:rPr lang="ko-KR" altLang="en-US" sz="1100" dirty="0"/>
+              <a:t> </a:t>
+            </a:r>
+            <a:r>
+              <a:rPr lang="en-US" altLang="ko-KR" sz="1100" dirty="0"/>
+              <a:t>-</a:t>
+            </a:r>
+            <a:r>
+              <a:rPr lang="ko-KR" altLang="en-US" sz="1100" dirty="0"/>
+              <a:t> 인사노무 뉴스와 법령 정보를 기반으로 </a:t>
+            </a:r>
+            <a:r>
+              <a:rPr lang="en-US" altLang="ko-KR" sz="1100" dirty="0"/>
+              <a:t>AI </a:t>
+            </a:r>
+            <a:r>
+              <a:rPr lang="ko-KR" altLang="en-US" sz="1100" dirty="0"/>
+              <a:t>노무 리스크 브리핑 기능을</a:t>
+            </a:r>
+            <a:r>
+              <a:rPr lang="en-US" altLang="ko-KR" sz="1100" dirty="0"/>
+              <a:t> </a:t>
+            </a:r>
+            <a:r>
+              <a:rPr lang="ko-KR" altLang="en-US" sz="1100" dirty="0"/>
+              <a:t>구현</a:t>
+            </a:r>
+            <a:r>
+              <a:rPr lang="en-US" altLang="ko-KR" sz="1100" dirty="0"/>
+              <a:t>  </a:t>
+            </a:r>
+          </a:p>
+          <a:p>
+            <a:pPr>
+              <a:defRPr/>
+            </a:pPr>
+            <a:r>
+              <a:rPr lang="ko-KR" altLang="en-US" sz="1100" dirty="0"/>
+              <a:t> </a:t>
+            </a:r>
+            <a:r>
+              <a:rPr lang="en-US" altLang="ko-KR" sz="1100" dirty="0"/>
+              <a:t>-</a:t>
+            </a:r>
+            <a:r>
+              <a:rPr lang="ko-KR" altLang="en-US" sz="1100" dirty="0"/>
+              <a:t> 다양한 외부 데이터를 실시간 수집</a:t>
+            </a:r>
+            <a:r>
+              <a:rPr lang="en-US" altLang="ko-KR" sz="1100" dirty="0"/>
+              <a:t>·</a:t>
+            </a:r>
+            <a:r>
+              <a:rPr lang="ko-KR" altLang="en-US" sz="1100" dirty="0"/>
+              <a:t>분석하는 자동화 파이프라인을 구축</a:t>
+            </a:r>
+            <a:endParaRPr lang="en-US" altLang="ko-KR" sz="1100" dirty="0"/>
           </a:p>
           <a:p>
             <a:pPr>
@@ -4916,48 +5012,119 @@
               <a:rPr lang="ko-KR" altLang="en-US" sz="1100" b="1" dirty="0"/>
               <a:t>기대효과</a:t>
             </a:r>
-            <a:endParaRPr lang="en-US" altLang="ko-KR" sz="1100" dirty="0"/>
+            <a:endParaRPr lang="en-US" altLang="ko-KR" sz="1100" b="1" dirty="0"/>
           </a:p>
           <a:p>
             <a:pPr>
               <a:defRPr/>
             </a:pPr>
             <a:r>
-              <a:rPr lang="ko-KR" altLang="en-US" sz="1100" dirty="0"/>
-              <a:t>경쟁사 동향 파악 등 정보 수집에 낭비되는 시간 개선 가능 </a:t>
-            </a:r>
-            <a:r>
-              <a:rPr lang="en-US" altLang="ko-KR" sz="1100" dirty="0"/>
-              <a:t>(</a:t>
-            </a:r>
-            <a:r>
-              <a:rPr lang="ko-KR" altLang="en-US" sz="1100" dirty="0" err="1"/>
-              <a:t>年</a:t>
-            </a:r>
+              <a:rPr lang="ko-KR" altLang="ko-KR" sz="1100" dirty="0"/>
+              <a:t>실시간 정보 제공과 AI 분석 자동화를 통해 의사결정 속도 향상, 리스크 대응 강화, 업무 생산성 증대를 실현함.</a:t>
+            </a:r>
+          </a:p>
+          <a:p>
+            <a:pPr>
+              <a:defRPr/>
+            </a:pPr>
             <a:r>
               <a:rPr lang="ko-KR" altLang="en-US" sz="1100" dirty="0"/>
               <a:t> </a:t>
             </a:r>
             <a:r>
               <a:rPr lang="en-US" altLang="ko-KR" sz="1100" dirty="0"/>
-              <a:t>50</a:t>
+              <a:t>-</a:t>
             </a:r>
             <a:r>
               <a:rPr lang="ko-KR" altLang="en-US" sz="1100" dirty="0"/>
-              <a:t>시간</a:t>
+              <a:t> 경쟁사</a:t>
             </a:r>
             <a:r>
               <a:rPr lang="en-US" altLang="ko-KR" sz="1100" dirty="0"/>
-              <a:t>)</a:t>
-            </a:r>
-          </a:p>
-          <a:p>
-            <a:pPr marL="171450" indent="-171450">
-              <a:buFontTx/>
-              <a:buChar char="-"/>
+              <a:t>, </a:t>
+            </a:r>
+            <a:r>
+              <a:rPr lang="ko-KR" altLang="en-US" sz="1100" dirty="0"/>
+              <a:t>시장 및 노무 관련 정보를 실시간으로 통합 제공하여 경영진의 신속한 의사결정을 지원함</a:t>
+            </a:r>
+            <a:r>
+              <a:rPr lang="en-US" altLang="ko-KR" sz="1100" dirty="0"/>
+              <a:t>.</a:t>
+            </a:r>
+          </a:p>
+          <a:p>
+            <a:pPr>
               <a:defRPr/>
             </a:pPr>
-            <a:endParaRPr lang="ko-KR" altLang="en-US" sz="1100" dirty="0"/>
+            <a:r>
+              <a:rPr lang="ko-KR" altLang="en-US" sz="1100" dirty="0"/>
+              <a:t> </a:t>
+            </a:r>
+            <a:r>
+              <a:rPr lang="en-US" altLang="ko-KR" sz="1100" dirty="0"/>
+              <a:t>-</a:t>
+            </a:r>
+            <a:r>
+              <a:rPr lang="ko-KR" altLang="en-US" sz="1100" dirty="0"/>
+              <a:t> 원자재</a:t>
+            </a:r>
+            <a:r>
+              <a:rPr lang="en-US" altLang="ko-KR" sz="1100" dirty="0"/>
+              <a:t>·</a:t>
+            </a:r>
+            <a:r>
+              <a:rPr lang="ko-KR" altLang="en-US" sz="1100" dirty="0"/>
+              <a:t>환율</a:t>
+            </a:r>
+            <a:r>
+              <a:rPr lang="en-US" altLang="ko-KR" sz="1100" dirty="0"/>
+              <a:t>·</a:t>
+            </a:r>
+            <a:r>
+              <a:rPr lang="ko-KR" altLang="en-US" sz="1100" dirty="0"/>
+              <a:t>에너지 가격 변동을 조기에 파악하여 구매 및 원가 리스크 대응 역량을 강화함</a:t>
+            </a:r>
+            <a:r>
+              <a:rPr lang="en-US" altLang="ko-KR" sz="1100" dirty="0"/>
+              <a:t>.</a:t>
+            </a:r>
+          </a:p>
+          <a:p>
+            <a:pPr>
+              <a:defRPr/>
+            </a:pPr>
+            <a:r>
+              <a:rPr lang="ko-KR" altLang="en-US" sz="1100" dirty="0"/>
+              <a:t> </a:t>
+            </a:r>
+            <a:r>
+              <a:rPr lang="en-US" altLang="ko-KR" sz="1100" dirty="0"/>
+              <a:t>-</a:t>
+            </a:r>
+            <a:r>
+              <a:rPr lang="ko-KR" altLang="en-US" sz="1100" dirty="0"/>
+              <a:t> </a:t>
+            </a:r>
+            <a:r>
+              <a:rPr lang="en-US" altLang="ko-KR" sz="1100" dirty="0"/>
+              <a:t>AI </a:t>
+            </a:r>
+            <a:r>
+              <a:rPr lang="ko-KR" altLang="en-US" sz="1100" dirty="0"/>
+              <a:t>기반 자동 분석과 보고서 생성으로 정보 수집</a:t>
+            </a:r>
+            <a:r>
+              <a:rPr lang="en-US" altLang="ko-KR" sz="1100" dirty="0"/>
+              <a:t>·</a:t>
+            </a:r>
+            <a:r>
+              <a:rPr lang="ko-KR" altLang="en-US" sz="1100" dirty="0"/>
+              <a:t>분석 업무를 효율화하고 업무 생산성을 향상시킴</a:t>
+            </a:r>
+            <a:r>
+              <a:rPr lang="en-US" altLang="ko-KR" sz="1100" dirty="0"/>
+              <a:t>.</a:t>
+            </a:r>
           </a:p>
         </p:txBody>
       </p:sp>
